--- a/Archive/Presentations/Boulder_2025/2025_October_glTF.pptx
+++ b/Archive/Presentations/Boulder_2025/2025_October_glTF.pptx
@@ -3256,7 +3256,7 @@
           <a:p>
             <a:fld id="{8028D1E4-4BBA-6F41-9D9B-7C498DFA1119}" type="datetimeFigureOut">
               <a:rPr lang="en-US" smtClean="0"/>
-              <a:t>10/24/2025</a:t>
+              <a:t>10/27/2025</a:t>
             </a:fld>
             <a:endParaRPr lang="en-US"/>
           </a:p>
@@ -3433,7 +3433,7 @@
           <a:p>
             <a:fld id="{761ABE01-8AD2-744F-9651-CCC9DC857332}" type="datetimeFigureOut">
               <a:rPr lang="en-US" smtClean="0"/>
-              <a:t>10/24/2025</a:t>
+              <a:t>10/27/2025</a:t>
             </a:fld>
             <a:endParaRPr lang="en-US"/>
           </a:p>
@@ -5459,7 +5459,7 @@
             <a:fld id="{1D8BD707-D9CF-40AE-B4C6-C98DA3205C09}" type="datetimeFigureOut">
               <a:rPr lang="en-US" smtClean="0"/>
               <a:pPr/>
-              <a:t>10/24/2025</a:t>
+              <a:t>10/27/2025</a:t>
             </a:fld>
             <a:endParaRPr lang="en-US" dirty="0"/>
           </a:p>
@@ -6305,25 +6305,13 @@
               <a:rPr lang="en-US" dirty="0">
                 <a:latin typeface="+mn-lt"/>
               </a:rPr>
-              <a:t>	Josh Lieberman, </a:t>
-            </a:r>
-            <a:r>
-              <a:rPr lang="en-US" dirty="0" err="1">
-                <a:latin typeface="+mn-lt"/>
-              </a:rPr>
-              <a:t>xxxxx</a:t>
-            </a:r>
-            <a:r>
-              <a:rPr lang="en-US" dirty="0">
-                <a:latin typeface="+mn-lt"/>
-              </a:rPr>
-              <a:t>, </a:t>
-            </a:r>
-            <a:r>
-              <a:rPr lang="en-US" dirty="0" err="1">
-                <a:latin typeface="+mn-lt"/>
-              </a:rPr>
-              <a:t>j@m</a:t>
+              <a:t>	Josh Lieberman, Tumbling Walls, </a:t>
+            </a:r>
+            <a:r>
+              <a:rPr lang="de-DE" dirty="0">
+                <a:latin typeface="+mn-lt"/>
+              </a:rPr>
+              <a:t>jlieberman@tumblingwalls.com&gt;</a:t>
             </a:r>
             <a:endParaRPr lang="en-US" dirty="0">
               <a:latin typeface="+mn-lt"/>
@@ -6351,7 +6339,19 @@
               <a:rPr lang="en-US" dirty="0">
                 <a:latin typeface="+mn-lt"/>
               </a:rPr>
-              <a:t>	Draft</a:t>
+              <a:t>	</a:t>
+            </a:r>
+            <a:r>
+              <a:rPr lang="en-US" dirty="0" err="1">
+                <a:latin typeface="+mn-lt"/>
+              </a:rPr>
+              <a:t>Khonos</a:t>
+            </a:r>
+            <a:r>
+              <a:rPr lang="en-US" dirty="0">
+                <a:latin typeface="+mn-lt"/>
+              </a:rPr>
+              <a:t> “Idea” = Draft</a:t>
             </a:r>
           </a:p>
           <a:p>
@@ -7383,12 +7383,17 @@
           <a:bodyPr/>
           <a:lstStyle/>
           <a:p>
-            <a:pPr marL="0" indent="0">
-              <a:buNone/>
-            </a:pPr>
             <a:r>
               <a:rPr lang="en-US" dirty="0"/>
-              <a:t>Made preliminary submission: status  </a:t>
+              <a:t>Convert (“render”) hundreds of million </a:t>
+            </a:r>
+            <a:r>
+              <a:rPr lang="en-US" dirty="0" err="1"/>
+              <a:t>CityGML</a:t>
+            </a:r>
+            <a:r>
+              <a:rPr lang="en-US" dirty="0"/>
+              <a:t> buildings to </a:t>
             </a:r>
             <a:r>
               <a:rPr lang="en-US" dirty="0" err="1"/>
@@ -7396,39 +7401,22 @@
             </a:r>
             <a:r>
               <a:rPr lang="en-US" dirty="0"/>
-              <a:t> “Idea”</a:t>
-            </a:r>
-          </a:p>
-          <a:p>
-            <a:pPr marL="0" indent="0">
-              <a:buNone/>
-            </a:pPr>
+              <a:t>.</a:t>
+            </a:r>
+          </a:p>
+          <a:p>
+            <a:pPr lvl="1"/>
             <a:r>
               <a:rPr lang="en-US" dirty="0"/>
-              <a:t>When </a:t>
-            </a:r>
-            <a:r>
-              <a:rPr lang="en-US" dirty="0" err="1"/>
-              <a:t>GeoPoseIT</a:t>
-            </a:r>
+              <a:t>Immediately makes the individual buildings integrable into custom-made models.</a:t>
+            </a:r>
+          </a:p>
+          <a:p>
+            <a:pPr lvl="1"/>
             <a:r>
               <a:rPr lang="en-US" dirty="0"/>
-              <a:t> service to attach extension to any existing </a:t>
-            </a:r>
-            <a:r>
-              <a:rPr lang="en-US" dirty="0" err="1"/>
-              <a:t>glTF</a:t>
-            </a:r>
-            <a:r>
-              <a:rPr lang="en-US" dirty="0"/>
-              <a:t> file is online, will go to next step in the Khronos process. ETA Q1 2026.</a:t>
-            </a:r>
-          </a:p>
-          <a:p>
-            <a:pPr marL="0" indent="0">
-              <a:buNone/>
-            </a:pPr>
-            <a:endParaRPr lang="en-US" dirty="0"/>
+              <a:t>Automated annotation of ML training imagery.</a:t>
+            </a:r>
           </a:p>
           <a:p>
             <a:pPr marL="0" indent="0">
@@ -7491,7 +7479,15 @@
           <a:p>
             <a:r>
               <a:rPr lang="en-US" dirty="0"/>
-              <a:t>Status</a:t>
+              <a:t>A </a:t>
+            </a:r>
+            <a:r>
+              <a:rPr lang="en-US" dirty="0" err="1"/>
+              <a:t>Cruss</a:t>
+            </a:r>
+            <a:r>
+              <a:rPr lang="en-US" dirty="0"/>
+              <a:t>-SWG Application of the Extension</a:t>
             </a:r>
           </a:p>
         </p:txBody>
